--- a/word-drafts/figures/Observability-Fig10-Facets.pptx
+++ b/word-drafts/figures/Observability-Fig10-Facets.pptx
@@ -3358,7 +3358,7 @@
         <p:spPr>
           <a:xfrm>
             <a:off x="2667000" y="1228725"/>
-            <a:ext cx="485775" cy="123825"/>
+            <a:ext cx="609600" cy="123825"/>
           </a:xfrm>
           <a:prstGeom prst="rect">
             <a:avLst/>
@@ -3429,7 +3429,7 @@
         <p:spPr>
           <a:xfrm>
             <a:off x="3952875" y="1228725"/>
-            <a:ext cx="771525" cy="123825"/>
+            <a:ext cx="962025" cy="123825"/>
           </a:xfrm>
           <a:prstGeom prst="rect">
             <a:avLst/>
@@ -3500,7 +3500,7 @@
         <p:spPr>
           <a:xfrm>
             <a:off x="5238750" y="1228725"/>
-            <a:ext cx="504825" cy="123825"/>
+            <a:ext cx="638175" cy="123825"/>
           </a:xfrm>
           <a:prstGeom prst="rect">
             <a:avLst/>
